--- a/GeoAI_Bilbao_Presentacion.pptx
+++ b/GeoAI_Bilbao_Presentacion.pptx
@@ -133,7 +133,7 @@
 <file path=ppt/charts/chart1.xml><?xml version="1.0" encoding="utf-8"?>
 <c:chartSpace xmlns:c="http://schemas.openxmlformats.org/drawingml/2006/chart" xmlns:a="http://schemas.openxmlformats.org/drawingml/2006/main" xmlns:r="http://schemas.openxmlformats.org/officeDocument/2006/relationships" xmlns:c16r2="http://schemas.microsoft.com/office/drawing/2015/06/chart">
   <c:date1904 val="0"/>
-  <c:lang val="es-ES"/>
+  <c:lang val="en-US"/>
   <c:roundedCorners val="1"/>
   <c:style val="2"/>
   <c:chart>
@@ -844,7 +844,7 @@
 <file path=ppt/charts/chart2.xml><?xml version="1.0" encoding="utf-8"?>
 <c:chartSpace xmlns:c="http://schemas.openxmlformats.org/drawingml/2006/chart" xmlns:a="http://schemas.openxmlformats.org/drawingml/2006/main" xmlns:r="http://schemas.openxmlformats.org/officeDocument/2006/relationships" xmlns:c16r2="http://schemas.microsoft.com/office/drawing/2015/06/chart">
   <c:date1904 val="0"/>
-  <c:lang val="es-ES"/>
+  <c:lang val="en-US"/>
   <c:roundedCorners val="1"/>
   <c:style val="2"/>
   <c:chart>
@@ -1114,7 +1114,7 @@
 <file path=ppt/charts/chart3.xml><?xml version="1.0" encoding="utf-8"?>
 <c:chartSpace xmlns:c="http://schemas.openxmlformats.org/drawingml/2006/chart" xmlns:a="http://schemas.openxmlformats.org/drawingml/2006/main" xmlns:r="http://schemas.openxmlformats.org/officeDocument/2006/relationships" xmlns:c16r2="http://schemas.microsoft.com/office/drawing/2015/06/chart">
   <c:date1904 val="0"/>
-  <c:lang val="es-ES"/>
+  <c:lang val="en-US"/>
   <c:roundedCorners val="1"/>
   <c:style val="2"/>
   <c:chart>
@@ -5612,7 +5612,7 @@
               <a:buNone/>
             </a:pPr>
             <a:r>
-              <a:rPr lang="en-US" sz="1050" dirty="0">
+              <a:rPr lang="en-US" sz="1400" dirty="0">
                 <a:solidFill>
                   <a:srgbClr val="5B7184"/>
                 </a:solidFill>
@@ -5622,7 +5622,7 @@
               </a:rPr>
               <a:t>Densidad de carreteras y uso de suelo (OSM) a 500m/1km/2km</a:t>
             </a:r>
-            <a:endParaRPr lang="en-US" sz="1050" dirty="0"/>
+            <a:endParaRPr lang="en-US" sz="1400" dirty="0"/>
           </a:p>
         </p:txBody>
       </p:sp>
@@ -5758,7 +5758,7 @@
               <a:buNone/>
             </a:pPr>
             <a:r>
-              <a:rPr lang="en-US" sz="1050" dirty="0">
+              <a:rPr lang="en-US" sz="1400" dirty="0">
                 <a:solidFill>
                   <a:srgbClr val="5B7184"/>
                 </a:solidFill>
@@ -5768,7 +5768,7 @@
               </a:rPr>
               <a:t>Distancia Haversine a puerto, Petronor, AP-8, costa y centro</a:t>
             </a:r>
-            <a:endParaRPr lang="en-US" sz="1050" dirty="0"/>
+            <a:endParaRPr lang="en-US" sz="1400" dirty="0"/>
           </a:p>
         </p:txBody>
       </p:sp>
@@ -5904,7 +5904,7 @@
               <a:buNone/>
             </a:pPr>
             <a:r>
-              <a:rPr lang="en-US" sz="1050" dirty="0">
+              <a:rPr lang="en-US" sz="1400" dirty="0">
                 <a:solidFill>
                   <a:srgbClr val="5B7184"/>
                 </a:solidFill>
@@ -5914,7 +5914,7 @@
               </a:rPr>
               <a:t>Elevación, pendiente y índice de relieve — Copernicus GLO-30</a:t>
             </a:r>
-            <a:endParaRPr lang="en-US" sz="1050" dirty="0"/>
+            <a:endParaRPr lang="en-US" sz="1400" dirty="0"/>
           </a:p>
         </p:txBody>
       </p:sp>
@@ -6050,7 +6050,7 @@
               <a:buNone/>
             </a:pPr>
             <a:r>
-              <a:rPr lang="en-US" sz="1050" dirty="0">
+              <a:rPr lang="en-US" sz="1400" dirty="0">
                 <a:solidFill>
                   <a:srgbClr val="5B7184"/>
                 </a:solidFill>
@@ -6060,7 +6060,7 @@
               </a:rPr>
               <a:t>Dirección de viento ERA5 × estación — patrones de dispersión</a:t>
             </a:r>
-            <a:endParaRPr lang="en-US" sz="1050" dirty="0"/>
+            <a:endParaRPr lang="en-US" sz="1400" dirty="0"/>
           </a:p>
         </p:txBody>
       </p:sp>
@@ -6902,7 +6902,7 @@
           <p:nvPr>
             <p:extLst>
               <p:ext uri="{D42A27DB-BD31-4B8C-83A1-F6EECF244321}">
-                <p14:modId xmlns:p14="http://schemas.microsoft.com/office/powerpoint/2010/main" val="1579011935"/>
+                <p14:modId xmlns:p14="http://schemas.microsoft.com/office/powerpoint/2010/main" val="2848692697"/>
               </p:ext>
             </p:extLst>
           </p:nvPr>
@@ -6958,7 +6958,7 @@
                     <a:bodyPr/>
                     <a:lstStyle/>
                     <a:p>
-                      <a:pPr marL="0" indent="0">
+                      <a:pPr marL="0" indent="0" algn="ctr">
                         <a:buNone/>
                       </a:pPr>
                       <a:r>
@@ -7019,7 +7019,7 @@
                     <a:bodyPr/>
                     <a:lstStyle/>
                     <a:p>
-                      <a:pPr marL="0" indent="0">
+                      <a:pPr marL="0" indent="0" algn="ctr">
                         <a:buNone/>
                       </a:pPr>
                       <a:r>
@@ -7080,7 +7080,7 @@
                     <a:bodyPr/>
                     <a:lstStyle/>
                     <a:p>
-                      <a:pPr marL="0" indent="0">
+                      <a:pPr marL="0" indent="0" algn="ctr">
                         <a:buNone/>
                       </a:pPr>
                       <a:r>
@@ -7141,7 +7141,7 @@
                     <a:bodyPr/>
                     <a:lstStyle/>
                     <a:p>
-                      <a:pPr marL="0" indent="0">
+                      <a:pPr marL="0" indent="0" algn="ctr">
                         <a:buNone/>
                       </a:pPr>
                       <a:r>
@@ -7202,7 +7202,7 @@
                     <a:bodyPr/>
                     <a:lstStyle/>
                     <a:p>
-                      <a:pPr marL="0" indent="0">
+                      <a:pPr marL="0" indent="0" algn="ctr">
                         <a:buNone/>
                       </a:pPr>
                       <a:r>
@@ -7270,7 +7270,7 @@
                     <a:bodyPr/>
                     <a:lstStyle/>
                     <a:p>
-                      <a:pPr marL="0" indent="0" algn="l">
+                      <a:pPr marL="0" indent="0" algn="ctr">
                         <a:buNone/>
                       </a:pPr>
                       <a:r>
@@ -7502,7 +7502,7 @@
                     <a:bodyPr/>
                     <a:lstStyle/>
                     <a:p>
-                      <a:pPr marL="0" indent="0" algn="l">
+                      <a:pPr marL="0" indent="0" algn="ctr">
                         <a:buNone/>
                       </a:pPr>
                       <a:r>
@@ -7567,7 +7567,7 @@
                     <a:bodyPr/>
                     <a:lstStyle/>
                     <a:p>
-                      <a:pPr marL="0" indent="0" algn="l">
+                      <a:pPr marL="0" indent="0" algn="ctr">
                         <a:buNone/>
                       </a:pPr>
                       <a:r>
@@ -7799,7 +7799,7 @@
                     <a:bodyPr/>
                     <a:lstStyle/>
                     <a:p>
-                      <a:pPr marL="0" indent="0" algn="l">
+                      <a:pPr marL="0" indent="0" algn="ctr">
                         <a:buNone/>
                       </a:pPr>
                       <a:r>
@@ -7864,7 +7864,7 @@
                     <a:bodyPr/>
                     <a:lstStyle/>
                     <a:p>
-                      <a:pPr marL="0" indent="0" algn="l">
+                      <a:pPr marL="0" indent="0" algn="ctr">
                         <a:buNone/>
                       </a:pPr>
                       <a:r>
@@ -8096,7 +8096,7 @@
                     <a:bodyPr/>
                     <a:lstStyle/>
                     <a:p>
-                      <a:pPr marL="0" indent="0" algn="l">
+                      <a:pPr marL="0" indent="0" algn="ctr">
                         <a:buNone/>
                       </a:pPr>
                       <a:r>
@@ -8161,7 +8161,7 @@
                     <a:bodyPr/>
                     <a:lstStyle/>
                     <a:p>
-                      <a:pPr marL="0" indent="0" algn="l">
+                      <a:pPr marL="0" indent="0" algn="ctr">
                         <a:buNone/>
                       </a:pPr>
                       <a:r>
@@ -8393,7 +8393,7 @@
                     <a:bodyPr/>
                     <a:lstStyle/>
                     <a:p>
-                      <a:pPr marL="0" indent="0" algn="l">
+                      <a:pPr marL="0" indent="0" algn="ctr">
                         <a:buNone/>
                       </a:pPr>
                       <a:r>
@@ -15578,7 +15578,7 @@
         </p:nvSpPr>
         <p:spPr>
           <a:xfrm>
-            <a:off x="640080" y="1554480"/>
+            <a:off x="594360" y="1554480"/>
             <a:ext cx="5120640" cy="4206240"/>
           </a:xfrm>
           <a:prstGeom prst="roundRect">
@@ -15744,6 +15744,24 @@
               <a:buSzPct val="100000"/>
               <a:buChar char="•"/>
             </a:pPr>
+            <a:endParaRPr lang="en-US" sz="1150" dirty="0">
+              <a:solidFill>
+                <a:srgbClr val="5B7184"/>
+              </a:solidFill>
+              <a:latin typeface="Calibri" pitchFamily="34" charset="0"/>
+              <a:ea typeface="Calibri" pitchFamily="34" charset="-122"/>
+              <a:cs typeface="Calibri" pitchFamily="34" charset="-120"/>
+            </a:endParaRPr>
+          </a:p>
+          <a:p>
+            <a:pPr marL="342900" indent="-342900">
+              <a:spcAft>
+                <a:spcPts val="800"/>
+              </a:spcAft>
+              <a:buSzPct val="100000"/>
+              <a:buFontTx/>
+              <a:buChar char="•"/>
+            </a:pPr>
             <a:r>
               <a:rPr lang="en-US" sz="1150" dirty="0">
                 <a:solidFill>
@@ -15753,9 +15771,74 @@
                 <a:ea typeface="Calibri" pitchFamily="34" charset="-122"/>
                 <a:cs typeface="Calibri" pitchFamily="34" charset="-120"/>
               </a:rPr>
-              <a:t>Cobertura geográfica más amplia</a:t>
-            </a:r>
-            <a:endParaRPr lang="en-US" sz="1150" dirty="0"/>
+              <a:t>Series </a:t>
+            </a:r>
+            <a:r>
+              <a:rPr lang="en-US" sz="1150" dirty="0" err="1">
+                <a:solidFill>
+                  <a:srgbClr val="5B7184"/>
+                </a:solidFill>
+                <a:latin typeface="Calibri" pitchFamily="34" charset="0"/>
+                <a:ea typeface="Calibri" pitchFamily="34" charset="-122"/>
+                <a:cs typeface="Calibri" pitchFamily="34" charset="-120"/>
+              </a:rPr>
+              <a:t>temporales</a:t>
+            </a:r>
+            <a:r>
+              <a:rPr lang="en-US" sz="1150" dirty="0">
+                <a:solidFill>
+                  <a:srgbClr val="5B7184"/>
+                </a:solidFill>
+                <a:latin typeface="Calibri" pitchFamily="34" charset="0"/>
+                <a:ea typeface="Calibri" pitchFamily="34" charset="-122"/>
+                <a:cs typeface="Calibri" pitchFamily="34" charset="-120"/>
+              </a:rPr>
+              <a:t> </a:t>
+            </a:r>
+            <a:r>
+              <a:rPr lang="en-US" sz="1150" dirty="0" err="1">
+                <a:solidFill>
+                  <a:srgbClr val="5B7184"/>
+                </a:solidFill>
+                <a:latin typeface="Calibri" pitchFamily="34" charset="0"/>
+                <a:ea typeface="Calibri" pitchFamily="34" charset="-122"/>
+                <a:cs typeface="Calibri" pitchFamily="34" charset="-120"/>
+              </a:rPr>
+              <a:t>completas</a:t>
+            </a:r>
+            <a:r>
+              <a:rPr lang="en-US" sz="1150" dirty="0">
+                <a:solidFill>
+                  <a:srgbClr val="5B7184"/>
+                </a:solidFill>
+                <a:latin typeface="Calibri" pitchFamily="34" charset="0"/>
+                <a:ea typeface="Calibri" pitchFamily="34" charset="-122"/>
+                <a:cs typeface="Calibri" pitchFamily="34" charset="-120"/>
+              </a:rPr>
+              <a:t> y </a:t>
+            </a:r>
+            <a:r>
+              <a:rPr lang="en-US" sz="1150" dirty="0" err="1">
+                <a:solidFill>
+                  <a:srgbClr val="5B7184"/>
+                </a:solidFill>
+                <a:latin typeface="Calibri" pitchFamily="34" charset="0"/>
+                <a:ea typeface="Calibri" pitchFamily="34" charset="-122"/>
+                <a:cs typeface="Calibri" pitchFamily="34" charset="-120"/>
+              </a:rPr>
+              <a:t>consistentes</a:t>
+            </a:r>
+            <a:r>
+              <a:rPr lang="en-US" sz="1150" dirty="0">
+                <a:solidFill>
+                  <a:srgbClr val="5B7184"/>
+                </a:solidFill>
+                <a:latin typeface="Calibri" pitchFamily="34" charset="0"/>
+                <a:ea typeface="Calibri" pitchFamily="34" charset="-122"/>
+                <a:cs typeface="Calibri" pitchFamily="34" charset="-120"/>
+              </a:rPr>
+              <a:t> 2012–2026</a:t>
+            </a:r>
           </a:p>
           <a:p>
             <a:pPr marL="342900" indent="-342900">
@@ -15766,7 +15849,7 @@
               <a:buChar char="•"/>
             </a:pPr>
             <a:r>
-              <a:rPr lang="en-US" sz="1150" dirty="0">
+              <a:rPr lang="en-US" sz="1150" dirty="0" err="1">
                 <a:solidFill>
                   <a:srgbClr val="5B7184"/>
                 </a:solidFill>
@@ -15774,7 +15857,90 @@
                 <a:ea typeface="Calibri" pitchFamily="34" charset="-122"/>
                 <a:cs typeface="Calibri" pitchFamily="34" charset="-120"/>
               </a:rPr>
-              <a:t>Algunas con series temporales muy incompletas</a:t>
+              <a:t>Cobertura</a:t>
+            </a:r>
+            <a:r>
+              <a:rPr lang="en-US" sz="1150" dirty="0">
+                <a:solidFill>
+                  <a:srgbClr val="5B7184"/>
+                </a:solidFill>
+                <a:latin typeface="Calibri" pitchFamily="34" charset="0"/>
+                <a:ea typeface="Calibri" pitchFamily="34" charset="-122"/>
+                <a:cs typeface="Calibri" pitchFamily="34" charset="-120"/>
+              </a:rPr>
+              <a:t> geográfica </a:t>
+            </a:r>
+            <a:r>
+              <a:rPr lang="en-US" sz="1150" dirty="0" err="1">
+                <a:solidFill>
+                  <a:srgbClr val="5B7184"/>
+                </a:solidFill>
+                <a:latin typeface="Calibri" pitchFamily="34" charset="0"/>
+                <a:ea typeface="Calibri" pitchFamily="34" charset="-122"/>
+                <a:cs typeface="Calibri" pitchFamily="34" charset="-120"/>
+              </a:rPr>
+              <a:t>más</a:t>
+            </a:r>
+            <a:r>
+              <a:rPr lang="en-US" sz="1150" dirty="0">
+                <a:solidFill>
+                  <a:srgbClr val="5B7184"/>
+                </a:solidFill>
+                <a:latin typeface="Calibri" pitchFamily="34" charset="0"/>
+                <a:ea typeface="Calibri" pitchFamily="34" charset="-122"/>
+                <a:cs typeface="Calibri" pitchFamily="34" charset="-120"/>
+              </a:rPr>
+              <a:t> </a:t>
+            </a:r>
+            <a:r>
+              <a:rPr lang="en-US" sz="1150" dirty="0" err="1">
+                <a:solidFill>
+                  <a:srgbClr val="5B7184"/>
+                </a:solidFill>
+                <a:latin typeface="Calibri" pitchFamily="34" charset="0"/>
+                <a:ea typeface="Calibri" pitchFamily="34" charset="-122"/>
+                <a:cs typeface="Calibri" pitchFamily="34" charset="-120"/>
+              </a:rPr>
+              <a:t>amplia</a:t>
+            </a:r>
+            <a:endParaRPr lang="en-US" sz="1150" dirty="0">
+              <a:solidFill>
+                <a:srgbClr val="5B7184"/>
+              </a:solidFill>
+              <a:latin typeface="Calibri" pitchFamily="34" charset="0"/>
+              <a:ea typeface="Calibri" pitchFamily="34" charset="-122"/>
+              <a:cs typeface="Calibri" pitchFamily="34" charset="-120"/>
+            </a:endParaRPr>
+          </a:p>
+          <a:p>
+            <a:pPr marL="342900" indent="-342900">
+              <a:spcAft>
+                <a:spcPts val="800"/>
+              </a:spcAft>
+              <a:buSzPct val="100000"/>
+              <a:buChar char="•"/>
+            </a:pPr>
+            <a:r>
+              <a:rPr lang="en-US" sz="1150" dirty="0" err="1">
+                <a:solidFill>
+                  <a:srgbClr val="5B7184"/>
+                </a:solidFill>
+                <a:latin typeface="Calibri" pitchFamily="34" charset="0"/>
+                <a:ea typeface="Calibri" pitchFamily="34" charset="-122"/>
+                <a:cs typeface="Calibri" pitchFamily="34" charset="-120"/>
+              </a:rPr>
+              <a:t>Algunas</a:t>
+            </a:r>
+            <a:r>
+              <a:rPr lang="en-US" sz="1150" dirty="0">
+                <a:solidFill>
+                  <a:srgbClr val="5B7184"/>
+                </a:solidFill>
+                <a:latin typeface="Calibri" pitchFamily="34" charset="0"/>
+                <a:ea typeface="Calibri" pitchFamily="34" charset="-122"/>
+                <a:cs typeface="Calibri" pitchFamily="34" charset="-120"/>
+              </a:rPr>
+              <a:t> con series temporales muy incompletas</a:t>
             </a:r>
             <a:endParaRPr lang="en-US" sz="1150" dirty="0"/>
           </a:p>
@@ -16103,91 +16269,13 @@
       </p:grpSpPr>
       <p:sp>
         <p:nvSpPr>
-          <p:cNvPr id="2" name="Text 0"/>
-          <p:cNvSpPr/>
-          <p:nvPr/>
-        </p:nvSpPr>
-        <p:spPr>
-          <a:xfrm>
-            <a:off x="640080" y="457200"/>
-            <a:ext cx="9144000" cy="640080"/>
-          </a:xfrm>
-          <a:prstGeom prst="rect">
-            <a:avLst/>
-          </a:prstGeom>
-          <a:noFill/>
-          <a:ln/>
-        </p:spPr>
-        <p:txBody>
-          <a:bodyPr wrap="square" rtlCol="0" anchor="ctr"/>
-          <a:lstStyle/>
-          <a:p>
-            <a:pPr marL="0" indent="0">
-              <a:buNone/>
-            </a:pPr>
-            <a:r>
-              <a:rPr lang="en-US" sz="2800" b="1" dirty="0">
-                <a:solidFill>
-                  <a:srgbClr val="0B3954"/>
-                </a:solidFill>
-                <a:latin typeface="Cambria" pitchFamily="34" charset="0"/>
-                <a:ea typeface="Cambria" pitchFamily="34" charset="-122"/>
-                <a:cs typeface="Cambria" pitchFamily="34" charset="-120"/>
-              </a:rPr>
-              <a:t>Depuración de Variables — Contaminantes</a:t>
-            </a:r>
-            <a:endParaRPr lang="en-US" sz="2800" dirty="0"/>
-          </a:p>
-        </p:txBody>
-      </p:sp>
-      <p:sp>
-        <p:nvSpPr>
-          <p:cNvPr id="3" name="Text 1"/>
-          <p:cNvSpPr/>
-          <p:nvPr/>
-        </p:nvSpPr>
-        <p:spPr>
-          <a:xfrm>
-            <a:off x="640080" y="1024128"/>
-            <a:ext cx="9144000" cy="365760"/>
-          </a:xfrm>
-          <a:prstGeom prst="rect">
-            <a:avLst/>
-          </a:prstGeom>
-          <a:noFill/>
-          <a:ln/>
-        </p:spPr>
-        <p:txBody>
-          <a:bodyPr wrap="square" rtlCol="0" anchor="ctr"/>
-          <a:lstStyle/>
-          <a:p>
-            <a:pPr marL="0" indent="0">
-              <a:buNone/>
-            </a:pPr>
-            <a:r>
-              <a:rPr lang="en-US" sz="1300" i="1" dirty="0">
-                <a:solidFill>
-                  <a:srgbClr val="5B7184"/>
-                </a:solidFill>
-                <a:latin typeface="Calibri" pitchFamily="34" charset="0"/>
-                <a:ea typeface="Calibri" pitchFamily="34" charset="-122"/>
-                <a:cs typeface="Calibri" pitchFamily="34" charset="-120"/>
-              </a:rPr>
-              <a:t>El mismo criterio de calidad se aplicó a las variables medidas</a:t>
-            </a:r>
-            <a:endParaRPr lang="en-US" sz="1300" dirty="0"/>
-          </a:p>
-        </p:txBody>
-      </p:sp>
-      <p:sp>
-        <p:nvSpPr>
           <p:cNvPr id="4" name="Shape 2"/>
           <p:cNvSpPr/>
           <p:nvPr/>
         </p:nvSpPr>
         <p:spPr>
           <a:xfrm>
-            <a:off x="640080" y="1600200"/>
+            <a:off x="635549" y="1687068"/>
             <a:ext cx="5212080" cy="4160520"/>
           </a:xfrm>
           <a:prstGeom prst="roundRect">
@@ -16207,17 +16295,310 @@
             </a:outerShdw>
           </a:effectLst>
         </p:spPr>
-      </p:sp>
-      <p:sp>
-        <p:nvSpPr>
-          <p:cNvPr id="5" name="Text 3"/>
-          <p:cNvSpPr/>
-          <p:nvPr/>
-        </p:nvSpPr>
-        <p:spPr>
-          <a:xfrm>
-            <a:off x="914400" y="1783080"/>
-            <a:ext cx="4663440" cy="365760"/>
+        <p:txBody>
+          <a:bodyPr/>
+          <a:lstStyle/>
+          <a:p>
+            <a:endParaRPr lang="es-ES" dirty="0"/>
+          </a:p>
+        </p:txBody>
+      </p:sp>
+      <p:sp>
+        <p:nvSpPr>
+          <p:cNvPr id="52" name="Shape 4">
+            <a:extLst>
+              <a:ext uri="{FF2B5EF4-FFF2-40B4-BE49-F238E27FC236}">
+                <a16:creationId xmlns:a16="http://schemas.microsoft.com/office/drawing/2014/main" id="{53523BFE-7C3A-8A5C-876F-0EA511C5C8F3}"/>
+              </a:ext>
+            </a:extLst>
+          </p:cNvPr>
+          <p:cNvSpPr/>
+          <p:nvPr/>
+        </p:nvSpPr>
+        <p:spPr>
+          <a:xfrm>
+            <a:off x="966401" y="4131528"/>
+            <a:ext cx="1189130" cy="502920"/>
+          </a:xfrm>
+          <a:prstGeom prst="ellipse">
+            <a:avLst/>
+          </a:prstGeom>
+          <a:solidFill>
+            <a:srgbClr val="F4442E"/>
+          </a:solidFill>
+          <a:ln/>
+        </p:spPr>
+      </p:sp>
+      <p:sp>
+        <p:nvSpPr>
+          <p:cNvPr id="53" name="Shape 4">
+            <a:extLst>
+              <a:ext uri="{FF2B5EF4-FFF2-40B4-BE49-F238E27FC236}">
+                <a16:creationId xmlns:a16="http://schemas.microsoft.com/office/drawing/2014/main" id="{3CF3DBC1-34A4-3FE9-7042-9416F1324D87}"/>
+              </a:ext>
+            </a:extLst>
+          </p:cNvPr>
+          <p:cNvSpPr/>
+          <p:nvPr/>
+        </p:nvSpPr>
+        <p:spPr>
+          <a:xfrm>
+            <a:off x="2440561" y="4152123"/>
+            <a:ext cx="1189130" cy="502920"/>
+          </a:xfrm>
+          <a:prstGeom prst="ellipse">
+            <a:avLst/>
+          </a:prstGeom>
+          <a:solidFill>
+            <a:srgbClr val="F4442E"/>
+          </a:solidFill>
+          <a:ln/>
+        </p:spPr>
+      </p:sp>
+      <p:sp>
+        <p:nvSpPr>
+          <p:cNvPr id="54" name="Shape 4">
+            <a:extLst>
+              <a:ext uri="{FF2B5EF4-FFF2-40B4-BE49-F238E27FC236}">
+                <a16:creationId xmlns:a16="http://schemas.microsoft.com/office/drawing/2014/main" id="{C92B2B03-71B5-CCD5-C69A-44C728710AFA}"/>
+              </a:ext>
+            </a:extLst>
+          </p:cNvPr>
+          <p:cNvSpPr/>
+          <p:nvPr/>
+        </p:nvSpPr>
+        <p:spPr>
+          <a:xfrm>
+            <a:off x="4175038" y="4219008"/>
+            <a:ext cx="1189130" cy="502920"/>
+          </a:xfrm>
+          <a:prstGeom prst="ellipse">
+            <a:avLst/>
+          </a:prstGeom>
+          <a:solidFill>
+            <a:srgbClr val="F4442E"/>
+          </a:solidFill>
+          <a:ln/>
+        </p:spPr>
+      </p:sp>
+      <p:sp>
+        <p:nvSpPr>
+          <p:cNvPr id="55" name="Shape 4">
+            <a:extLst>
+              <a:ext uri="{FF2B5EF4-FFF2-40B4-BE49-F238E27FC236}">
+                <a16:creationId xmlns:a16="http://schemas.microsoft.com/office/drawing/2014/main" id="{20B8E6A0-E3E4-4552-98C9-6BB6A878A435}"/>
+              </a:ext>
+            </a:extLst>
+          </p:cNvPr>
+          <p:cNvSpPr/>
+          <p:nvPr/>
+        </p:nvSpPr>
+        <p:spPr>
+          <a:xfrm>
+            <a:off x="1251431" y="4637677"/>
+            <a:ext cx="1189130" cy="502920"/>
+          </a:xfrm>
+          <a:prstGeom prst="ellipse">
+            <a:avLst/>
+          </a:prstGeom>
+          <a:solidFill>
+            <a:srgbClr val="F4442E"/>
+          </a:solidFill>
+          <a:ln/>
+        </p:spPr>
+      </p:sp>
+      <p:sp>
+        <p:nvSpPr>
+          <p:cNvPr id="56" name="Shape 4">
+            <a:extLst>
+              <a:ext uri="{FF2B5EF4-FFF2-40B4-BE49-F238E27FC236}">
+                <a16:creationId xmlns:a16="http://schemas.microsoft.com/office/drawing/2014/main" id="{577145C8-1606-0AB0-5B6E-29EFB76B2E21}"/>
+              </a:ext>
+            </a:extLst>
+          </p:cNvPr>
+          <p:cNvSpPr/>
+          <p:nvPr/>
+        </p:nvSpPr>
+        <p:spPr>
+          <a:xfrm>
+            <a:off x="2763794" y="4852692"/>
+            <a:ext cx="1274084" cy="502920"/>
+          </a:xfrm>
+          <a:prstGeom prst="ellipse">
+            <a:avLst/>
+          </a:prstGeom>
+          <a:solidFill>
+            <a:srgbClr val="F4442E"/>
+          </a:solidFill>
+          <a:ln/>
+        </p:spPr>
+      </p:sp>
+      <p:sp>
+        <p:nvSpPr>
+          <p:cNvPr id="51" name="Shape 4">
+            <a:extLst>
+              <a:ext uri="{FF2B5EF4-FFF2-40B4-BE49-F238E27FC236}">
+                <a16:creationId xmlns:a16="http://schemas.microsoft.com/office/drawing/2014/main" id="{9156480D-1EE0-0885-99C9-94E706891E61}"/>
+              </a:ext>
+            </a:extLst>
+          </p:cNvPr>
+          <p:cNvSpPr/>
+          <p:nvPr/>
+        </p:nvSpPr>
+        <p:spPr>
+          <a:xfrm>
+            <a:off x="3962194" y="3736271"/>
+            <a:ext cx="502920" cy="502920"/>
+          </a:xfrm>
+          <a:prstGeom prst="ellipse">
+            <a:avLst/>
+          </a:prstGeom>
+          <a:solidFill>
+            <a:srgbClr val="F4442E"/>
+          </a:solidFill>
+          <a:ln/>
+        </p:spPr>
+      </p:sp>
+      <p:sp>
+        <p:nvSpPr>
+          <p:cNvPr id="50" name="Shape 4">
+            <a:extLst>
+              <a:ext uri="{FF2B5EF4-FFF2-40B4-BE49-F238E27FC236}">
+                <a16:creationId xmlns:a16="http://schemas.microsoft.com/office/drawing/2014/main" id="{255F4518-949E-E881-20B4-4BDF29246E13}"/>
+              </a:ext>
+            </a:extLst>
+          </p:cNvPr>
+          <p:cNvSpPr/>
+          <p:nvPr/>
+        </p:nvSpPr>
+        <p:spPr>
+          <a:xfrm>
+            <a:off x="2518514" y="3693850"/>
+            <a:ext cx="502920" cy="502920"/>
+          </a:xfrm>
+          <a:prstGeom prst="ellipse">
+            <a:avLst/>
+          </a:prstGeom>
+          <a:solidFill>
+            <a:srgbClr val="F4442E"/>
+          </a:solidFill>
+          <a:ln/>
+        </p:spPr>
+      </p:sp>
+      <p:sp>
+        <p:nvSpPr>
+          <p:cNvPr id="49" name="Shape 4">
+            <a:extLst>
+              <a:ext uri="{FF2B5EF4-FFF2-40B4-BE49-F238E27FC236}">
+                <a16:creationId xmlns:a16="http://schemas.microsoft.com/office/drawing/2014/main" id="{5A480827-372A-90DC-1CC3-0AC806E1A539}"/>
+              </a:ext>
+            </a:extLst>
+          </p:cNvPr>
+          <p:cNvSpPr/>
+          <p:nvPr/>
+        </p:nvSpPr>
+        <p:spPr>
+          <a:xfrm>
+            <a:off x="1493315" y="3585612"/>
+            <a:ext cx="502920" cy="502920"/>
+          </a:xfrm>
+          <a:prstGeom prst="ellipse">
+            <a:avLst/>
+          </a:prstGeom>
+          <a:solidFill>
+            <a:srgbClr val="F4442E"/>
+          </a:solidFill>
+          <a:ln/>
+        </p:spPr>
+      </p:sp>
+      <p:sp>
+        <p:nvSpPr>
+          <p:cNvPr id="48" name="Shape 4">
+            <a:extLst>
+              <a:ext uri="{FF2B5EF4-FFF2-40B4-BE49-F238E27FC236}">
+                <a16:creationId xmlns:a16="http://schemas.microsoft.com/office/drawing/2014/main" id="{3C5361D3-11E9-BCE6-E308-DB91F19A2652}"/>
+              </a:ext>
+            </a:extLst>
+          </p:cNvPr>
+          <p:cNvSpPr/>
+          <p:nvPr/>
+        </p:nvSpPr>
+        <p:spPr>
+          <a:xfrm>
+            <a:off x="726938" y="3679909"/>
+            <a:ext cx="502920" cy="502920"/>
+          </a:xfrm>
+          <a:prstGeom prst="ellipse">
+            <a:avLst/>
+          </a:prstGeom>
+          <a:solidFill>
+            <a:srgbClr val="F4442E"/>
+          </a:solidFill>
+          <a:ln/>
+        </p:spPr>
+      </p:sp>
+      <p:sp>
+        <p:nvSpPr>
+          <p:cNvPr id="29" name="Shape 4">
+            <a:extLst>
+              <a:ext uri="{FF2B5EF4-FFF2-40B4-BE49-F238E27FC236}">
+                <a16:creationId xmlns:a16="http://schemas.microsoft.com/office/drawing/2014/main" id="{B309A16B-E6E9-7C47-18D2-FC3CE515DBD4}"/>
+              </a:ext>
+            </a:extLst>
+          </p:cNvPr>
+          <p:cNvSpPr/>
+          <p:nvPr/>
+        </p:nvSpPr>
+        <p:spPr>
+          <a:xfrm>
+            <a:off x="2730842" y="2292470"/>
+            <a:ext cx="502920" cy="502920"/>
+          </a:xfrm>
+          <a:prstGeom prst="ellipse">
+            <a:avLst/>
+          </a:prstGeom>
+          <a:solidFill>
+            <a:srgbClr val="F4442E"/>
+          </a:solidFill>
+          <a:ln/>
+        </p:spPr>
+      </p:sp>
+      <p:sp>
+        <p:nvSpPr>
+          <p:cNvPr id="28" name="Shape 7">
+            <a:extLst>
+              <a:ext uri="{FF2B5EF4-FFF2-40B4-BE49-F238E27FC236}">
+                <a16:creationId xmlns:a16="http://schemas.microsoft.com/office/drawing/2014/main" id="{3EC36A6F-9BCE-C25D-0C30-92FB63EC9B20}"/>
+              </a:ext>
+            </a:extLst>
+          </p:cNvPr>
+          <p:cNvSpPr/>
+          <p:nvPr/>
+        </p:nvSpPr>
+        <p:spPr>
+          <a:xfrm>
+            <a:off x="1127760" y="2276311"/>
+            <a:ext cx="502920" cy="502920"/>
+          </a:xfrm>
+          <a:prstGeom prst="ellipse">
+            <a:avLst/>
+          </a:prstGeom>
+          <a:solidFill>
+            <a:srgbClr val="F4442E"/>
+          </a:solidFill>
+          <a:ln/>
+        </p:spPr>
+      </p:sp>
+      <p:sp>
+        <p:nvSpPr>
+          <p:cNvPr id="2" name="Text 0"/>
+          <p:cNvSpPr/>
+          <p:nvPr/>
+        </p:nvSpPr>
+        <p:spPr>
+          <a:xfrm>
+            <a:off x="640080" y="457200"/>
+            <a:ext cx="9144000" cy="640080"/>
           </a:xfrm>
           <a:prstGeom prst="rect">
             <a:avLst/>
@@ -16226,24 +16607,102 @@
           <a:ln/>
         </p:spPr>
         <p:txBody>
-          <a:bodyPr wrap="square" lIns="0" tIns="0" rIns="0" bIns="0" rtlCol="0" anchor="ctr"/>
+          <a:bodyPr wrap="square" rtlCol="0" anchor="ctr"/>
           <a:lstStyle/>
           <a:p>
             <a:pPr marL="0" indent="0">
               <a:buNone/>
             </a:pPr>
             <a:r>
-              <a:rPr lang="en-US" sz="1300" b="1" dirty="0">
-                <a:solidFill>
-                  <a:srgbClr val="12232E"/>
+              <a:rPr lang="en-US" sz="2800" b="1" dirty="0">
+                <a:solidFill>
+                  <a:srgbClr val="0B3954"/>
+                </a:solidFill>
+                <a:latin typeface="Cambria" pitchFamily="34" charset="0"/>
+                <a:ea typeface="Cambria" pitchFamily="34" charset="-122"/>
+                <a:cs typeface="Cambria" pitchFamily="34" charset="-120"/>
+              </a:rPr>
+              <a:t>Depuración de Variables — Contaminantes</a:t>
+            </a:r>
+            <a:endParaRPr lang="en-US" sz="2800" dirty="0"/>
+          </a:p>
+        </p:txBody>
+      </p:sp>
+      <p:sp>
+        <p:nvSpPr>
+          <p:cNvPr id="3" name="Text 1"/>
+          <p:cNvSpPr/>
+          <p:nvPr/>
+        </p:nvSpPr>
+        <p:spPr>
+          <a:xfrm>
+            <a:off x="640080" y="1024128"/>
+            <a:ext cx="9144000" cy="365760"/>
+          </a:xfrm>
+          <a:prstGeom prst="rect">
+            <a:avLst/>
+          </a:prstGeom>
+          <a:noFill/>
+          <a:ln/>
+        </p:spPr>
+        <p:txBody>
+          <a:bodyPr wrap="square" rtlCol="0" anchor="ctr"/>
+          <a:lstStyle/>
+          <a:p>
+            <a:pPr marL="0" indent="0">
+              <a:buNone/>
+            </a:pPr>
+            <a:r>
+              <a:rPr lang="en-US" sz="1300" i="1" dirty="0">
+                <a:solidFill>
+                  <a:srgbClr val="5B7184"/>
                 </a:solidFill>
                 <a:latin typeface="Calibri" pitchFamily="34" charset="0"/>
                 <a:ea typeface="Calibri" pitchFamily="34" charset="-122"/>
                 <a:cs typeface="Calibri" pitchFamily="34" charset="-120"/>
               </a:rPr>
+              <a:t>El mismo criterio de calidad se aplicó a las variables medidas</a:t>
+            </a:r>
+            <a:endParaRPr lang="en-US" sz="1300" dirty="0"/>
+          </a:p>
+        </p:txBody>
+      </p:sp>
+      <p:sp>
+        <p:nvSpPr>
+          <p:cNvPr id="5" name="Text 3"/>
+          <p:cNvSpPr/>
+          <p:nvPr/>
+        </p:nvSpPr>
+        <p:spPr>
+          <a:xfrm>
+            <a:off x="902042" y="2950334"/>
+            <a:ext cx="4663440" cy="365760"/>
+          </a:xfrm>
+          <a:prstGeom prst="rect">
+            <a:avLst/>
+          </a:prstGeom>
+          <a:noFill/>
+          <a:ln/>
+        </p:spPr>
+        <p:txBody>
+          <a:bodyPr wrap="square" lIns="0" tIns="0" rIns="0" bIns="0" rtlCol="0" anchor="ctr"/>
+          <a:lstStyle/>
+          <a:p>
+            <a:pPr marL="0" indent="0">
+              <a:buNone/>
+            </a:pPr>
+            <a:r>
+              <a:rPr lang="en-US" sz="1600" b="1" dirty="0">
+                <a:solidFill>
+                  <a:srgbClr val="12232E"/>
+                </a:solidFill>
+                <a:latin typeface="Calibri" pitchFamily="34" charset="0"/>
+                <a:ea typeface="Calibri" pitchFamily="34" charset="-122"/>
+                <a:cs typeface="Calibri" pitchFamily="34" charset="-120"/>
+              </a:rPr>
               <a:t>Eliminados por missing values</a:t>
             </a:r>
-            <a:endParaRPr lang="en-US" sz="1300" dirty="0"/>
+            <a:endParaRPr lang="en-US" sz="1600" dirty="0"/>
           </a:p>
         </p:txBody>
       </p:sp>
@@ -16255,7 +16714,7 @@
         </p:nvSpPr>
         <p:spPr>
           <a:xfrm>
-            <a:off x="914400" y="2286000"/>
+            <a:off x="4545431" y="5066318"/>
             <a:ext cx="502920" cy="502920"/>
           </a:xfrm>
           <a:prstGeom prst="ellipse">
@@ -16275,7 +16734,7 @@
         </p:nvSpPr>
         <p:spPr>
           <a:xfrm>
-            <a:off x="914400" y="2340864"/>
+            <a:off x="4522366" y="5130946"/>
             <a:ext cx="502920" cy="384048"/>
           </a:xfrm>
           <a:prstGeom prst="rect">
@@ -16308,52 +16767,13 @@
       </p:sp>
       <p:sp>
         <p:nvSpPr>
-          <p:cNvPr id="8" name="Text 6"/>
-          <p:cNvSpPr/>
-          <p:nvPr/>
-        </p:nvSpPr>
-        <p:spPr>
-          <a:xfrm>
-            <a:off x="1554480" y="2267712"/>
-            <a:ext cx="4114800" cy="868680"/>
-          </a:xfrm>
-          <a:prstGeom prst="rect">
-            <a:avLst/>
-          </a:prstGeom>
-          <a:noFill/>
-          <a:ln/>
-        </p:spPr>
-        <p:txBody>
-          <a:bodyPr wrap="square" lIns="0" tIns="0" rIns="0" bIns="0" rtlCol="0" anchor="ctr"/>
-          <a:lstStyle/>
-          <a:p>
-            <a:pPr marL="0" indent="0">
-              <a:buNone/>
-            </a:pPr>
-            <a:r>
-              <a:rPr lang="en-US" sz="1100" dirty="0">
-                <a:solidFill>
-                  <a:srgbClr val="5B7184"/>
-                </a:solidFill>
-                <a:latin typeface="Calibri" pitchFamily="34" charset="0"/>
-                <a:ea typeface="Calibri" pitchFamily="34" charset="-122"/>
-                <a:cs typeface="Calibri" pitchFamily="34" charset="-120"/>
-              </a:rPr>
-              <a:t>Monitoreo discontinuo entre estaciones — cobertura insuficiente tras filtrar las 7 estaciones finales.</a:t>
-            </a:r>
-            <a:endParaRPr lang="en-US" sz="1100" dirty="0"/>
-          </a:p>
-        </p:txBody>
-      </p:sp>
-      <p:sp>
-        <p:nvSpPr>
           <p:cNvPr id="9" name="Shape 7"/>
           <p:cNvSpPr/>
           <p:nvPr/>
         </p:nvSpPr>
         <p:spPr>
           <a:xfrm>
-            <a:off x="914400" y="3520440"/>
+            <a:off x="1167713" y="5144680"/>
             <a:ext cx="502920" cy="502920"/>
           </a:xfrm>
           <a:prstGeom prst="ellipse">
@@ -16373,7 +16793,7 @@
         </p:nvSpPr>
         <p:spPr>
           <a:xfrm>
-            <a:off x="914400" y="3575304"/>
+            <a:off x="1187484" y="5174713"/>
             <a:ext cx="502920" cy="384048"/>
           </a:xfrm>
           <a:prstGeom prst="rect">
@@ -16401,45 +16821,6 @@
               <a:t>O₃</a:t>
             </a:r>
             <a:endParaRPr lang="en-US" sz="1400" dirty="0"/>
-          </a:p>
-        </p:txBody>
-      </p:sp>
-      <p:sp>
-        <p:nvSpPr>
-          <p:cNvPr id="11" name="Text 9"/>
-          <p:cNvSpPr/>
-          <p:nvPr/>
-        </p:nvSpPr>
-        <p:spPr>
-          <a:xfrm>
-            <a:off x="1554480" y="3502152"/>
-            <a:ext cx="4114800" cy="868680"/>
-          </a:xfrm>
-          <a:prstGeom prst="rect">
-            <a:avLst/>
-          </a:prstGeom>
-          <a:noFill/>
-          <a:ln/>
-        </p:spPr>
-        <p:txBody>
-          <a:bodyPr wrap="square" lIns="0" tIns="0" rIns="0" bIns="0" rtlCol="0" anchor="ctr"/>
-          <a:lstStyle/>
-          <a:p>
-            <a:pPr marL="0" indent="0">
-              <a:buNone/>
-            </a:pPr>
-            <a:r>
-              <a:rPr lang="en-US" sz="1100" dirty="0">
-                <a:solidFill>
-                  <a:srgbClr val="5B7184"/>
-                </a:solidFill>
-                <a:latin typeface="Calibri" pitchFamily="34" charset="0"/>
-                <a:ea typeface="Calibri" pitchFamily="34" charset="-122"/>
-                <a:cs typeface="Calibri" pitchFamily="34" charset="-120"/>
-              </a:rPr>
-              <a:t>Series con vacíos significativos en múltiples años — no cumplía el umbral mínimo de datos válidos.</a:t>
-            </a:r>
-            <a:endParaRPr lang="en-US" sz="1100" dirty="0"/>
           </a:p>
         </p:txBody>
       </p:sp>
@@ -16791,6 +17172,704 @@
           </a:prstGeom>
         </p:spPr>
       </p:pic>
+      <p:sp>
+        <p:nvSpPr>
+          <p:cNvPr id="24" name="TextBox 23">
+            <a:extLst>
+              <a:ext uri="{FF2B5EF4-FFF2-40B4-BE49-F238E27FC236}">
+                <a16:creationId xmlns:a16="http://schemas.microsoft.com/office/drawing/2014/main" id="{718C372C-0B3F-D6D6-A0E2-5CF93CAFACE0}"/>
+              </a:ext>
+            </a:extLst>
+          </p:cNvPr>
+          <p:cNvSpPr txBox="1"/>
+          <p:nvPr/>
+        </p:nvSpPr>
+        <p:spPr>
+          <a:xfrm>
+            <a:off x="749849" y="3752926"/>
+            <a:ext cx="492211" cy="307777"/>
+          </a:xfrm>
+          <a:prstGeom prst="rect">
+            <a:avLst/>
+          </a:prstGeom>
+          <a:noFill/>
+        </p:spPr>
+        <p:txBody>
+          <a:bodyPr wrap="square">
+            <a:spAutoFit/>
+          </a:bodyPr>
+          <a:lstStyle/>
+          <a:p>
+            <a:r>
+              <a:rPr lang="es-ES" sz="1400" b="0" i="0" dirty="0">
+                <a:solidFill>
+                  <a:schemeClr val="bg1"/>
+                </a:solidFill>
+                <a:effectLst/>
+                <a:latin typeface="Consolas" panose="020B0609020204030204" pitchFamily="49" charset="0"/>
+              </a:rPr>
+              <a:t>O</a:t>
+            </a:r>
+            <a:r>
+              <a:rPr lang="es-ES" sz="1400" b="0" i="0" baseline="-25000" dirty="0">
+                <a:solidFill>
+                  <a:schemeClr val="bg1"/>
+                </a:solidFill>
+                <a:effectLst/>
+                <a:latin typeface="Consolas" panose="020B0609020204030204" pitchFamily="49" charset="0"/>
+              </a:rPr>
+              <a:t>3</a:t>
+            </a:r>
+            <a:r>
+              <a:rPr lang="es-ES" sz="1000" b="0" i="0" dirty="0">
+                <a:solidFill>
+                  <a:schemeClr val="bg1"/>
+                </a:solidFill>
+                <a:effectLst/>
+                <a:latin typeface="Consolas" panose="020B0609020204030204" pitchFamily="49" charset="0"/>
+              </a:rPr>
+              <a:t>8h</a:t>
+            </a:r>
+            <a:endParaRPr lang="es-ES" sz="1000" dirty="0">
+              <a:solidFill>
+                <a:schemeClr val="bg1"/>
+              </a:solidFill>
+            </a:endParaRPr>
+          </a:p>
+        </p:txBody>
+      </p:sp>
+      <p:sp>
+        <p:nvSpPr>
+          <p:cNvPr id="25" name="Text 3">
+            <a:extLst>
+              <a:ext uri="{FF2B5EF4-FFF2-40B4-BE49-F238E27FC236}">
+                <a16:creationId xmlns:a16="http://schemas.microsoft.com/office/drawing/2014/main" id="{56AA2AB8-51EA-0BA0-0D5A-8D52625A67AD}"/>
+              </a:ext>
+            </a:extLst>
+          </p:cNvPr>
+          <p:cNvSpPr/>
+          <p:nvPr/>
+        </p:nvSpPr>
+        <p:spPr>
+          <a:xfrm>
+            <a:off x="848497" y="1755903"/>
+            <a:ext cx="4663440" cy="365760"/>
+          </a:xfrm>
+          <a:prstGeom prst="rect">
+            <a:avLst/>
+          </a:prstGeom>
+          <a:noFill/>
+          <a:ln/>
+        </p:spPr>
+        <p:txBody>
+          <a:bodyPr wrap="square" lIns="0" tIns="0" rIns="0" bIns="0" rtlCol="0" anchor="ctr"/>
+          <a:lstStyle/>
+          <a:p>
+            <a:pPr marL="0" indent="0">
+              <a:buNone/>
+            </a:pPr>
+            <a:r>
+              <a:rPr lang="en-US" sz="1600" b="1" dirty="0">
+                <a:solidFill>
+                  <a:srgbClr val="12232E"/>
+                </a:solidFill>
+                <a:latin typeface="Calibri" pitchFamily="34" charset="0"/>
+                <a:ea typeface="Calibri" pitchFamily="34" charset="-122"/>
+                <a:cs typeface="Calibri" pitchFamily="34" charset="-120"/>
+              </a:rPr>
+              <a:t>Eliminados </a:t>
+            </a:r>
+            <a:r>
+              <a:rPr lang="en-US" sz="1600" b="1" dirty="0" err="1">
+                <a:solidFill>
+                  <a:srgbClr val="12232E"/>
+                </a:solidFill>
+                <a:latin typeface="Calibri" pitchFamily="34" charset="0"/>
+                <a:ea typeface="Calibri" pitchFamily="34" charset="-122"/>
+                <a:cs typeface="Calibri" pitchFamily="34" charset="-120"/>
+              </a:rPr>
+              <a:t>por</a:t>
+            </a:r>
+            <a:r>
+              <a:rPr lang="en-US" sz="1600" b="1" dirty="0">
+                <a:solidFill>
+                  <a:srgbClr val="12232E"/>
+                </a:solidFill>
+                <a:latin typeface="Calibri" pitchFamily="34" charset="0"/>
+                <a:ea typeface="Calibri" pitchFamily="34" charset="-122"/>
+                <a:cs typeface="Calibri" pitchFamily="34" charset="-120"/>
+              </a:rPr>
+              <a:t> </a:t>
+            </a:r>
+            <a:r>
+              <a:rPr lang="en-US" sz="1600" b="1" dirty="0" err="1">
+                <a:solidFill>
+                  <a:srgbClr val="12232E"/>
+                </a:solidFill>
+                <a:latin typeface="Calibri" pitchFamily="34" charset="0"/>
+                <a:ea typeface="Calibri" pitchFamily="34" charset="-122"/>
+                <a:cs typeface="Calibri" pitchFamily="34" charset="-120"/>
+              </a:rPr>
+              <a:t>correlación</a:t>
+            </a:r>
+            <a:r>
+              <a:rPr lang="en-US" sz="1600" b="1" dirty="0">
+                <a:solidFill>
+                  <a:srgbClr val="12232E"/>
+                </a:solidFill>
+                <a:latin typeface="Calibri" pitchFamily="34" charset="0"/>
+                <a:ea typeface="Calibri" pitchFamily="34" charset="-122"/>
+                <a:cs typeface="Calibri" pitchFamily="34" charset="-120"/>
+              </a:rPr>
+              <a:t> </a:t>
+            </a:r>
+            <a:r>
+              <a:rPr lang="en-US" sz="1600" b="1" dirty="0" err="1">
+                <a:solidFill>
+                  <a:srgbClr val="12232E"/>
+                </a:solidFill>
+                <a:latin typeface="Calibri" pitchFamily="34" charset="0"/>
+                <a:ea typeface="Calibri" pitchFamily="34" charset="-122"/>
+                <a:cs typeface="Calibri" pitchFamily="34" charset="-120"/>
+              </a:rPr>
+              <a:t>muy</a:t>
+            </a:r>
+            <a:r>
+              <a:rPr lang="en-US" sz="1600" b="1" dirty="0">
+                <a:solidFill>
+                  <a:srgbClr val="12232E"/>
+                </a:solidFill>
+                <a:latin typeface="Calibri" pitchFamily="34" charset="0"/>
+                <a:ea typeface="Calibri" pitchFamily="34" charset="-122"/>
+                <a:cs typeface="Calibri" pitchFamily="34" charset="-120"/>
+              </a:rPr>
+              <a:t> </a:t>
+            </a:r>
+            <a:r>
+              <a:rPr lang="en-US" sz="1600" b="1" dirty="0" err="1">
+                <a:solidFill>
+                  <a:srgbClr val="12232E"/>
+                </a:solidFill>
+                <a:latin typeface="Calibri" pitchFamily="34" charset="0"/>
+                <a:ea typeface="Calibri" pitchFamily="34" charset="-122"/>
+                <a:cs typeface="Calibri" pitchFamily="34" charset="-120"/>
+              </a:rPr>
+              <a:t>alta</a:t>
+            </a:r>
+            <a:endParaRPr lang="en-US" sz="1600" dirty="0"/>
+          </a:p>
+        </p:txBody>
+      </p:sp>
+      <p:sp>
+        <p:nvSpPr>
+          <p:cNvPr id="27" name="TextBox 26">
+            <a:extLst>
+              <a:ext uri="{FF2B5EF4-FFF2-40B4-BE49-F238E27FC236}">
+                <a16:creationId xmlns:a16="http://schemas.microsoft.com/office/drawing/2014/main" id="{B2F2451D-4F58-E464-3EAB-059C5C444FD3}"/>
+              </a:ext>
+            </a:extLst>
+          </p:cNvPr>
+          <p:cNvSpPr txBox="1"/>
+          <p:nvPr/>
+        </p:nvSpPr>
+        <p:spPr>
+          <a:xfrm>
+            <a:off x="1180070" y="2350190"/>
+            <a:ext cx="502920" cy="307777"/>
+          </a:xfrm>
+          <a:prstGeom prst="rect">
+            <a:avLst/>
+          </a:prstGeom>
+          <a:noFill/>
+        </p:spPr>
+        <p:txBody>
+          <a:bodyPr wrap="square">
+            <a:spAutoFit/>
+          </a:bodyPr>
+          <a:lstStyle/>
+          <a:p>
+            <a:r>
+              <a:rPr lang="es-ES" sz="1400" b="0" i="0" dirty="0">
+                <a:solidFill>
+                  <a:schemeClr val="bg1"/>
+                </a:solidFill>
+                <a:effectLst/>
+                <a:latin typeface="Consolas" panose="020B0609020204030204" pitchFamily="49" charset="0"/>
+              </a:rPr>
+              <a:t>NO</a:t>
+            </a:r>
+            <a:endParaRPr lang="es-ES" sz="1400" dirty="0">
+              <a:solidFill>
+                <a:schemeClr val="bg1"/>
+              </a:solidFill>
+            </a:endParaRPr>
+          </a:p>
+        </p:txBody>
+      </p:sp>
+      <p:sp>
+        <p:nvSpPr>
+          <p:cNvPr id="31" name="TextBox 30">
+            <a:extLst>
+              <a:ext uri="{FF2B5EF4-FFF2-40B4-BE49-F238E27FC236}">
+                <a16:creationId xmlns:a16="http://schemas.microsoft.com/office/drawing/2014/main" id="{C372FC3B-AE0D-66B9-8AF9-E7339A18BFA4}"/>
+              </a:ext>
+            </a:extLst>
+          </p:cNvPr>
+          <p:cNvSpPr txBox="1"/>
+          <p:nvPr/>
+        </p:nvSpPr>
+        <p:spPr>
+          <a:xfrm>
+            <a:off x="2763794" y="2380893"/>
+            <a:ext cx="502920" cy="307777"/>
+          </a:xfrm>
+          <a:prstGeom prst="rect">
+            <a:avLst/>
+          </a:prstGeom>
+          <a:noFill/>
+        </p:spPr>
+        <p:txBody>
+          <a:bodyPr wrap="square">
+            <a:spAutoFit/>
+          </a:bodyPr>
+          <a:lstStyle/>
+          <a:p>
+            <a:r>
+              <a:rPr lang="es-ES" sz="1400" b="0" i="0" dirty="0">
+                <a:solidFill>
+                  <a:schemeClr val="bg1"/>
+                </a:solidFill>
+                <a:effectLst/>
+                <a:latin typeface="Consolas" panose="020B0609020204030204" pitchFamily="49" charset="0"/>
+              </a:rPr>
+              <a:t>NO</a:t>
+            </a:r>
+            <a:r>
+              <a:rPr lang="es-ES" sz="1400" b="0" i="0" baseline="-25000" dirty="0">
+                <a:solidFill>
+                  <a:schemeClr val="bg1"/>
+                </a:solidFill>
+                <a:effectLst/>
+                <a:latin typeface="Consolas" panose="020B0609020204030204" pitchFamily="49" charset="0"/>
+              </a:rPr>
+              <a:t>X</a:t>
+            </a:r>
+            <a:endParaRPr lang="es-ES" sz="1400" baseline="-25000" dirty="0">
+              <a:solidFill>
+                <a:schemeClr val="bg1"/>
+              </a:solidFill>
+            </a:endParaRPr>
+          </a:p>
+        </p:txBody>
+      </p:sp>
+      <p:sp>
+        <p:nvSpPr>
+          <p:cNvPr id="33" name="TextBox 32">
+            <a:extLst>
+              <a:ext uri="{FF2B5EF4-FFF2-40B4-BE49-F238E27FC236}">
+                <a16:creationId xmlns:a16="http://schemas.microsoft.com/office/drawing/2014/main" id="{0F2500CC-6372-11C3-9844-D741907216B4}"/>
+              </a:ext>
+            </a:extLst>
+          </p:cNvPr>
+          <p:cNvSpPr txBox="1"/>
+          <p:nvPr/>
+        </p:nvSpPr>
+        <p:spPr>
+          <a:xfrm>
+            <a:off x="4376557" y="4275525"/>
+            <a:ext cx="895864" cy="307777"/>
+          </a:xfrm>
+          <a:prstGeom prst="rect">
+            <a:avLst/>
+          </a:prstGeom>
+          <a:noFill/>
+        </p:spPr>
+        <p:txBody>
+          <a:bodyPr wrap="square">
+            <a:spAutoFit/>
+          </a:bodyPr>
+          <a:lstStyle/>
+          <a:p>
+            <a:r>
+              <a:rPr lang="es-ES" sz="1400" b="0" i="0" dirty="0">
+                <a:solidFill>
+                  <a:schemeClr val="bg1"/>
+                </a:solidFill>
+                <a:effectLst/>
+                <a:latin typeface="Consolas" panose="020B0609020204030204" pitchFamily="49" charset="0"/>
+              </a:rPr>
+              <a:t>Benceno</a:t>
+            </a:r>
+            <a:endParaRPr lang="es-ES" sz="1400" dirty="0">
+              <a:solidFill>
+                <a:schemeClr val="bg1"/>
+              </a:solidFill>
+            </a:endParaRPr>
+          </a:p>
+        </p:txBody>
+      </p:sp>
+      <p:sp>
+        <p:nvSpPr>
+          <p:cNvPr id="35" name="TextBox 34">
+            <a:extLst>
+              <a:ext uri="{FF2B5EF4-FFF2-40B4-BE49-F238E27FC236}">
+                <a16:creationId xmlns:a16="http://schemas.microsoft.com/office/drawing/2014/main" id="{E0F21B9F-E4AE-6D85-0CB8-863BFD798A48}"/>
+              </a:ext>
+            </a:extLst>
+          </p:cNvPr>
+          <p:cNvSpPr txBox="1"/>
+          <p:nvPr/>
+        </p:nvSpPr>
+        <p:spPr>
+          <a:xfrm>
+            <a:off x="2478561" y="4235986"/>
+            <a:ext cx="1189131" cy="307777"/>
+          </a:xfrm>
+          <a:prstGeom prst="rect">
+            <a:avLst/>
+          </a:prstGeom>
+          <a:noFill/>
+        </p:spPr>
+        <p:txBody>
+          <a:bodyPr wrap="square">
+            <a:spAutoFit/>
+          </a:bodyPr>
+          <a:lstStyle/>
+          <a:p>
+            <a:r>
+              <a:rPr lang="es-ES" sz="1400" b="0" i="0" dirty="0" err="1">
+                <a:solidFill>
+                  <a:schemeClr val="bg1"/>
+                </a:solidFill>
+                <a:effectLst/>
+                <a:latin typeface="Consolas" panose="020B0609020204030204" pitchFamily="49" charset="0"/>
+              </a:rPr>
+              <a:t>Ortoxileno</a:t>
+            </a:r>
+            <a:endParaRPr lang="es-ES" sz="1400" dirty="0">
+              <a:solidFill>
+                <a:schemeClr val="bg1"/>
+              </a:solidFill>
+            </a:endParaRPr>
+          </a:p>
+        </p:txBody>
+      </p:sp>
+      <p:sp>
+        <p:nvSpPr>
+          <p:cNvPr id="37" name="TextBox 36">
+            <a:extLst>
+              <a:ext uri="{FF2B5EF4-FFF2-40B4-BE49-F238E27FC236}">
+                <a16:creationId xmlns:a16="http://schemas.microsoft.com/office/drawing/2014/main" id="{FB268558-9A78-53D6-40EE-576D5B9196DD}"/>
+              </a:ext>
+            </a:extLst>
+          </p:cNvPr>
+          <p:cNvSpPr txBox="1"/>
+          <p:nvPr/>
+        </p:nvSpPr>
+        <p:spPr>
+          <a:xfrm>
+            <a:off x="1476115" y="4723757"/>
+            <a:ext cx="958472" cy="307777"/>
+          </a:xfrm>
+          <a:prstGeom prst="rect">
+            <a:avLst/>
+          </a:prstGeom>
+          <a:noFill/>
+        </p:spPr>
+        <p:txBody>
+          <a:bodyPr wrap="square">
+            <a:spAutoFit/>
+          </a:bodyPr>
+          <a:lstStyle/>
+          <a:p>
+            <a:r>
+              <a:rPr lang="es-ES" sz="1400" b="0" i="0" dirty="0">
+                <a:solidFill>
+                  <a:schemeClr val="bg1"/>
+                </a:solidFill>
+                <a:effectLst/>
+                <a:latin typeface="Consolas" panose="020B0609020204030204" pitchFamily="49" charset="0"/>
+              </a:rPr>
+              <a:t>Tolueno</a:t>
+            </a:r>
+            <a:endParaRPr lang="es-ES" sz="1400" dirty="0">
+              <a:solidFill>
+                <a:schemeClr val="bg1"/>
+              </a:solidFill>
+            </a:endParaRPr>
+          </a:p>
+        </p:txBody>
+      </p:sp>
+      <p:sp>
+        <p:nvSpPr>
+          <p:cNvPr id="39" name="TextBox 38">
+            <a:extLst>
+              <a:ext uri="{FF2B5EF4-FFF2-40B4-BE49-F238E27FC236}">
+                <a16:creationId xmlns:a16="http://schemas.microsoft.com/office/drawing/2014/main" id="{75153C39-C984-13AC-E989-D6115EA549D3}"/>
+              </a:ext>
+            </a:extLst>
+          </p:cNvPr>
+          <p:cNvSpPr txBox="1"/>
+          <p:nvPr/>
+        </p:nvSpPr>
+        <p:spPr>
+          <a:xfrm>
+            <a:off x="4014862" y="3832443"/>
+            <a:ext cx="452873" cy="307777"/>
+          </a:xfrm>
+          <a:prstGeom prst="rect">
+            <a:avLst/>
+          </a:prstGeom>
+          <a:noFill/>
+        </p:spPr>
+        <p:txBody>
+          <a:bodyPr wrap="square">
+            <a:spAutoFit/>
+          </a:bodyPr>
+          <a:lstStyle/>
+          <a:p>
+            <a:r>
+              <a:rPr lang="es-ES" sz="1400" b="0" i="0" dirty="0">
+                <a:solidFill>
+                  <a:schemeClr val="bg1"/>
+                </a:solidFill>
+                <a:effectLst/>
+                <a:latin typeface="Consolas" panose="020B0609020204030204" pitchFamily="49" charset="0"/>
+              </a:rPr>
+              <a:t>NH</a:t>
+            </a:r>
+            <a:r>
+              <a:rPr lang="es-ES" sz="1400" b="0" i="0" baseline="-25000" dirty="0">
+                <a:solidFill>
+                  <a:schemeClr val="bg1"/>
+                </a:solidFill>
+                <a:effectLst/>
+                <a:latin typeface="Consolas" panose="020B0609020204030204" pitchFamily="49" charset="0"/>
+              </a:rPr>
+              <a:t>3</a:t>
+            </a:r>
+            <a:endParaRPr lang="es-ES" sz="1400" baseline="-25000" dirty="0">
+              <a:solidFill>
+                <a:schemeClr val="bg1"/>
+              </a:solidFill>
+            </a:endParaRPr>
+          </a:p>
+        </p:txBody>
+      </p:sp>
+      <p:sp>
+        <p:nvSpPr>
+          <p:cNvPr id="41" name="TextBox 40">
+            <a:extLst>
+              <a:ext uri="{FF2B5EF4-FFF2-40B4-BE49-F238E27FC236}">
+                <a16:creationId xmlns:a16="http://schemas.microsoft.com/office/drawing/2014/main" id="{5E14FEE2-0538-0D2C-0373-F34EECDE8842}"/>
+              </a:ext>
+            </a:extLst>
+          </p:cNvPr>
+          <p:cNvSpPr txBox="1"/>
+          <p:nvPr/>
+        </p:nvSpPr>
+        <p:spPr>
+          <a:xfrm>
+            <a:off x="2571181" y="3777480"/>
+            <a:ext cx="502921" cy="307777"/>
+          </a:xfrm>
+          <a:prstGeom prst="rect">
+            <a:avLst/>
+          </a:prstGeom>
+          <a:noFill/>
+        </p:spPr>
+        <p:txBody>
+          <a:bodyPr wrap="square">
+            <a:spAutoFit/>
+          </a:bodyPr>
+          <a:lstStyle/>
+          <a:p>
+            <a:r>
+              <a:rPr lang="es-ES" sz="1400" b="0" i="0" dirty="0">
+                <a:solidFill>
+                  <a:schemeClr val="bg1"/>
+                </a:solidFill>
+                <a:effectLst/>
+                <a:latin typeface="Consolas" panose="020B0609020204030204" pitchFamily="49" charset="0"/>
+              </a:rPr>
+              <a:t>SH</a:t>
+            </a:r>
+            <a:r>
+              <a:rPr lang="es-ES" sz="1400" b="0" i="0" baseline="-25000" dirty="0">
+                <a:solidFill>
+                  <a:schemeClr val="bg1"/>
+                </a:solidFill>
+                <a:effectLst/>
+                <a:latin typeface="Consolas" panose="020B0609020204030204" pitchFamily="49" charset="0"/>
+              </a:rPr>
+              <a:t>2</a:t>
+            </a:r>
+            <a:endParaRPr lang="es-ES" sz="1400" baseline="-25000" dirty="0">
+              <a:solidFill>
+                <a:schemeClr val="bg1"/>
+              </a:solidFill>
+            </a:endParaRPr>
+          </a:p>
+        </p:txBody>
+      </p:sp>
+      <p:sp>
+        <p:nvSpPr>
+          <p:cNvPr id="43" name="TextBox 42">
+            <a:extLst>
+              <a:ext uri="{FF2B5EF4-FFF2-40B4-BE49-F238E27FC236}">
+                <a16:creationId xmlns:a16="http://schemas.microsoft.com/office/drawing/2014/main" id="{7A73BECB-D7C2-E22D-A748-AC5AFDEE1BBB}"/>
+              </a:ext>
+            </a:extLst>
+          </p:cNvPr>
+          <p:cNvSpPr txBox="1"/>
+          <p:nvPr/>
+        </p:nvSpPr>
+        <p:spPr>
+          <a:xfrm>
+            <a:off x="1001617" y="4228128"/>
+            <a:ext cx="1370364" cy="307777"/>
+          </a:xfrm>
+          <a:prstGeom prst="rect">
+            <a:avLst/>
+          </a:prstGeom>
+          <a:noFill/>
+        </p:spPr>
+        <p:txBody>
+          <a:bodyPr wrap="square">
+            <a:spAutoFit/>
+          </a:bodyPr>
+          <a:lstStyle/>
+          <a:p>
+            <a:r>
+              <a:rPr lang="es-ES" sz="1400" b="0" i="0" dirty="0">
+                <a:solidFill>
+                  <a:schemeClr val="bg1"/>
+                </a:solidFill>
+                <a:effectLst/>
+                <a:latin typeface="Consolas" panose="020B0609020204030204" pitchFamily="49" charset="0"/>
+              </a:rPr>
+              <a:t>M-P-XILENO</a:t>
+            </a:r>
+            <a:endParaRPr lang="es-ES" sz="1400" dirty="0">
+              <a:solidFill>
+                <a:schemeClr val="bg1"/>
+              </a:solidFill>
+            </a:endParaRPr>
+          </a:p>
+        </p:txBody>
+      </p:sp>
+      <p:sp>
+        <p:nvSpPr>
+          <p:cNvPr id="45" name="TextBox 44">
+            <a:extLst>
+              <a:ext uri="{FF2B5EF4-FFF2-40B4-BE49-F238E27FC236}">
+                <a16:creationId xmlns:a16="http://schemas.microsoft.com/office/drawing/2014/main" id="{26F1D6E6-843D-A6AC-BD9D-C9F20AF564C8}"/>
+              </a:ext>
+            </a:extLst>
+          </p:cNvPr>
+          <p:cNvSpPr txBox="1"/>
+          <p:nvPr/>
+        </p:nvSpPr>
+        <p:spPr>
+          <a:xfrm>
+            <a:off x="1493520" y="3710229"/>
+            <a:ext cx="598891" cy="307777"/>
+          </a:xfrm>
+          <a:prstGeom prst="rect">
+            <a:avLst/>
+          </a:prstGeom>
+          <a:noFill/>
+        </p:spPr>
+        <p:txBody>
+          <a:bodyPr wrap="square">
+            <a:spAutoFit/>
+          </a:bodyPr>
+          <a:lstStyle/>
+          <a:p>
+            <a:r>
+              <a:rPr lang="es-ES" sz="1400" b="0" i="0" dirty="0">
+                <a:solidFill>
+                  <a:schemeClr val="bg1"/>
+                </a:solidFill>
+                <a:effectLst/>
+                <a:latin typeface="Consolas" panose="020B0609020204030204" pitchFamily="49" charset="0"/>
+              </a:rPr>
+              <a:t>CO</a:t>
+            </a:r>
+            <a:r>
+              <a:rPr lang="es-ES" sz="1000" b="0" i="0" dirty="0">
+                <a:solidFill>
+                  <a:schemeClr val="bg1"/>
+                </a:solidFill>
+                <a:effectLst/>
+                <a:latin typeface="Consolas" panose="020B0609020204030204" pitchFamily="49" charset="0"/>
+              </a:rPr>
+              <a:t>8h</a:t>
+            </a:r>
+            <a:r>
+              <a:rPr lang="es-ES" sz="1400" b="0" i="0" dirty="0">
+                <a:solidFill>
+                  <a:schemeClr val="bg1"/>
+                </a:solidFill>
+                <a:effectLst/>
+                <a:latin typeface="Consolas" panose="020B0609020204030204" pitchFamily="49" charset="0"/>
+              </a:rPr>
+              <a:t> </a:t>
+            </a:r>
+            <a:endParaRPr lang="es-ES" sz="1400" dirty="0">
+              <a:solidFill>
+                <a:schemeClr val="bg1"/>
+              </a:solidFill>
+            </a:endParaRPr>
+          </a:p>
+        </p:txBody>
+      </p:sp>
+      <p:sp>
+        <p:nvSpPr>
+          <p:cNvPr id="47" name="TextBox 46">
+            <a:extLst>
+              <a:ext uri="{FF2B5EF4-FFF2-40B4-BE49-F238E27FC236}">
+                <a16:creationId xmlns:a16="http://schemas.microsoft.com/office/drawing/2014/main" id="{3EB55491-D059-E29D-A6D6-AC67A18F2570}"/>
+              </a:ext>
+            </a:extLst>
+          </p:cNvPr>
+          <p:cNvSpPr txBox="1"/>
+          <p:nvPr/>
+        </p:nvSpPr>
+        <p:spPr>
+          <a:xfrm>
+            <a:off x="2767397" y="4944540"/>
+            <a:ext cx="1370364" cy="307777"/>
+          </a:xfrm>
+          <a:prstGeom prst="rect">
+            <a:avLst/>
+          </a:prstGeom>
+          <a:noFill/>
+        </p:spPr>
+        <p:txBody>
+          <a:bodyPr wrap="square">
+            <a:spAutoFit/>
+          </a:bodyPr>
+          <a:lstStyle/>
+          <a:p>
+            <a:r>
+              <a:rPr lang="es-ES" sz="1400" b="0" i="0" dirty="0">
+                <a:solidFill>
+                  <a:schemeClr val="bg1"/>
+                </a:solidFill>
+                <a:effectLst/>
+                <a:latin typeface="Consolas" panose="020B0609020204030204" pitchFamily="49" charset="0"/>
+              </a:rPr>
+              <a:t>Etilbenceno</a:t>
+            </a:r>
+            <a:endParaRPr lang="es-ES" sz="1400" dirty="0">
+              <a:solidFill>
+                <a:schemeClr val="bg1"/>
+              </a:solidFill>
+            </a:endParaRPr>
+          </a:p>
+        </p:txBody>
+      </p:sp>
     </p:spTree>
   </p:cSld>
   <p:clrMapOvr>
@@ -20056,7 +21135,83 @@
                 <a:ea typeface="Calibri" pitchFamily="34" charset="-122"/>
                 <a:cs typeface="Calibri" pitchFamily="34" charset="-120"/>
               </a:rPr>
-              <a:t>BARAKALDO aparece como estación con outliers en 3 de los 4 contaminantes — consistente con su perfil de mayor densidad de tráfico e industria, confirmado posteriormente por el análisis espacial GIS (densidad de carreteras más alta de la red).</a:t>
+              <a:t>BARAKALDO aparece como estación con outliers en 3 de los 4 </a:t>
+            </a:r>
+            <a:r>
+              <a:rPr lang="en-US" sz="1250" dirty="0" err="1">
+                <a:solidFill>
+                  <a:srgbClr val="DCEEF0"/>
+                </a:solidFill>
+                <a:latin typeface="Calibri" pitchFamily="34" charset="0"/>
+                <a:ea typeface="Calibri" pitchFamily="34" charset="-122"/>
+                <a:cs typeface="Calibri" pitchFamily="34" charset="-120"/>
+              </a:rPr>
+              <a:t>contaminantes</a:t>
+            </a:r>
+            <a:r>
+              <a:rPr lang="en-US" sz="1250" dirty="0">
+                <a:solidFill>
+                  <a:srgbClr val="DCEEF0"/>
+                </a:solidFill>
+                <a:latin typeface="Calibri" pitchFamily="34" charset="0"/>
+                <a:ea typeface="Calibri" pitchFamily="34" charset="-122"/>
+                <a:cs typeface="Calibri" pitchFamily="34" charset="-120"/>
+              </a:rPr>
+              <a:t> </a:t>
+            </a:r>
+          </a:p>
+          <a:p>
+            <a:pPr marL="0" indent="0">
+              <a:buNone/>
+            </a:pPr>
+            <a:r>
+              <a:rPr lang="en-US" sz="1250" dirty="0">
+                <a:solidFill>
+                  <a:srgbClr val="DCEEF0"/>
+                </a:solidFill>
+                <a:latin typeface="Calibri" pitchFamily="34" charset="0"/>
+                <a:ea typeface="Calibri" pitchFamily="34" charset="-122"/>
+                <a:cs typeface="Calibri" pitchFamily="34" charset="-120"/>
+              </a:rPr>
+              <a:t>— consistente con su perfil de mayor densidad de tráfico e industria, confirmado posteriormente por el análisis </a:t>
+            </a:r>
+            <a:r>
+              <a:rPr lang="en-US" sz="1250" dirty="0" err="1">
+                <a:solidFill>
+                  <a:srgbClr val="DCEEF0"/>
+                </a:solidFill>
+                <a:latin typeface="Calibri" pitchFamily="34" charset="0"/>
+                <a:ea typeface="Calibri" pitchFamily="34" charset="-122"/>
+                <a:cs typeface="Calibri" pitchFamily="34" charset="-120"/>
+              </a:rPr>
+              <a:t>espacial</a:t>
+            </a:r>
+            <a:r>
+              <a:rPr lang="en-US" sz="1250" dirty="0">
+                <a:solidFill>
+                  <a:srgbClr val="DCEEF0"/>
+                </a:solidFill>
+                <a:latin typeface="Calibri" pitchFamily="34" charset="0"/>
+                <a:ea typeface="Calibri" pitchFamily="34" charset="-122"/>
+                <a:cs typeface="Calibri" pitchFamily="34" charset="-120"/>
+              </a:rPr>
+              <a:t> GIS</a:t>
+            </a:r>
+          </a:p>
+          <a:p>
+            <a:pPr marL="0" indent="0">
+              <a:buNone/>
+            </a:pPr>
+            <a:r>
+              <a:rPr lang="en-US" sz="1250" dirty="0">
+                <a:solidFill>
+                  <a:srgbClr val="DCEEF0"/>
+                </a:solidFill>
+                <a:latin typeface="Calibri" pitchFamily="34" charset="0"/>
+                <a:ea typeface="Calibri" pitchFamily="34" charset="-122"/>
+                <a:cs typeface="Calibri" pitchFamily="34" charset="-120"/>
+              </a:rPr>
+              <a:t> (densidad de carreteras más alta de la red).</a:t>
             </a:r>
             <a:endParaRPr lang="en-US" sz="1250" dirty="0"/>
           </a:p>
